--- a/프로젝트발표/자바은행.pptx
+++ b/프로젝트발표/자바은행.pptx
@@ -5,7 +5,7 @@
     <p:sldMasterId id="2147483648" r:id="rId1"/>
   </p:sldMasterIdLst>
   <p:notesMasterIdLst>
-    <p:notesMasterId r:id="rId56"/>
+    <p:notesMasterId r:id="rId57"/>
   </p:notesMasterIdLst>
   <p:sldIdLst>
     <p:sldId id="267" r:id="rId2"/>
@@ -41,27 +41,28 @@
     <p:sldId id="297" r:id="rId32"/>
     <p:sldId id="298" r:id="rId33"/>
     <p:sldId id="299" r:id="rId34"/>
-    <p:sldId id="300" r:id="rId35"/>
-    <p:sldId id="301" r:id="rId36"/>
-    <p:sldId id="302" r:id="rId37"/>
-    <p:sldId id="303" r:id="rId38"/>
-    <p:sldId id="304" r:id="rId39"/>
-    <p:sldId id="275" r:id="rId40"/>
-    <p:sldId id="277" r:id="rId41"/>
-    <p:sldId id="279" r:id="rId42"/>
-    <p:sldId id="280" r:id="rId43"/>
-    <p:sldId id="283" r:id="rId44"/>
-    <p:sldId id="284" r:id="rId45"/>
-    <p:sldId id="285" r:id="rId46"/>
-    <p:sldId id="286" r:id="rId47"/>
-    <p:sldId id="287" r:id="rId48"/>
-    <p:sldId id="289" r:id="rId49"/>
-    <p:sldId id="305" r:id="rId50"/>
-    <p:sldId id="306" r:id="rId51"/>
-    <p:sldId id="307" r:id="rId52"/>
-    <p:sldId id="308" r:id="rId53"/>
-    <p:sldId id="309" r:id="rId54"/>
-    <p:sldId id="310" r:id="rId55"/>
+    <p:sldId id="311" r:id="rId35"/>
+    <p:sldId id="300" r:id="rId36"/>
+    <p:sldId id="301" r:id="rId37"/>
+    <p:sldId id="302" r:id="rId38"/>
+    <p:sldId id="303" r:id="rId39"/>
+    <p:sldId id="304" r:id="rId40"/>
+    <p:sldId id="275" r:id="rId41"/>
+    <p:sldId id="277" r:id="rId42"/>
+    <p:sldId id="279" r:id="rId43"/>
+    <p:sldId id="280" r:id="rId44"/>
+    <p:sldId id="283" r:id="rId45"/>
+    <p:sldId id="284" r:id="rId46"/>
+    <p:sldId id="285" r:id="rId47"/>
+    <p:sldId id="286" r:id="rId48"/>
+    <p:sldId id="287" r:id="rId49"/>
+    <p:sldId id="289" r:id="rId50"/>
+    <p:sldId id="305" r:id="rId51"/>
+    <p:sldId id="306" r:id="rId52"/>
+    <p:sldId id="307" r:id="rId53"/>
+    <p:sldId id="308" r:id="rId54"/>
+    <p:sldId id="309" r:id="rId55"/>
+    <p:sldId id="310" r:id="rId56"/>
   </p:sldIdLst>
   <p:sldSz cx="12192000" cy="6858000"/>
   <p:notesSz cx="6858000" cy="9144000"/>
@@ -582,7 +583,7 @@
           <a:p>
             <a:fld id="{F03747A5-15E1-4459-B3A8-07EC66B2416B}" type="slidenum">
               <a:rPr lang="ko-KR" altLang="en-US" smtClean="0"/>
-              <a:t>52</a:t>
+              <a:t>53</a:t>
             </a:fld>
             <a:endParaRPr lang="ko-KR" altLang="en-US"/>
           </a:p>
@@ -690,7 +691,7 @@
           <a:p>
             <a:fld id="{F03747A5-15E1-4459-B3A8-07EC66B2416B}" type="slidenum">
               <a:rPr lang="ko-KR" altLang="en-US" smtClean="0"/>
-              <a:t>53</a:t>
+              <a:t>54</a:t>
             </a:fld>
             <a:endParaRPr lang="ko-KR" altLang="en-US"/>
           </a:p>
@@ -25966,6 +25967,487 @@
         <p:cNvPr id="1" name="">
           <a:extLst>
             <a:ext uri="{FF2B5EF4-FFF2-40B4-BE49-F238E27FC236}">
+              <a16:creationId xmlns:a16="http://schemas.microsoft.com/office/drawing/2014/main" id="{F6C5FD82-BDC0-4ED4-96B8-3783EA3E2C5C}"/>
+            </a:ext>
+          </a:extLst>
+        </p:cNvPr>
+        <p:cNvGrpSpPr/>
+        <p:nvPr/>
+      </p:nvGrpSpPr>
+      <p:grpSpPr>
+        <a:xfrm>
+          <a:off x="0" y="0"/>
+          <a:ext cx="0" cy="0"/>
+          <a:chOff x="0" y="0"/>
+          <a:chExt cx="0" cy="0"/>
+        </a:xfrm>
+      </p:grpSpPr>
+      <p:sp>
+        <p:nvSpPr>
+          <p:cNvPr id="6" name="TextBox 5">
+            <a:extLst>
+              <a:ext uri="{FF2B5EF4-FFF2-40B4-BE49-F238E27FC236}">
+                <a16:creationId xmlns:a16="http://schemas.microsoft.com/office/drawing/2014/main" id="{9C621B01-4CAC-A654-3D94-AF62655255D3}"/>
+              </a:ext>
+            </a:extLst>
+          </p:cNvPr>
+          <p:cNvSpPr txBox="1"/>
+          <p:nvPr/>
+        </p:nvSpPr>
+        <p:spPr>
+          <a:xfrm>
+            <a:off x="328246" y="377952"/>
+            <a:ext cx="5043854" cy="584775"/>
+          </a:xfrm>
+          <a:prstGeom prst="rect">
+            <a:avLst/>
+          </a:prstGeom>
+          <a:noFill/>
+        </p:spPr>
+        <p:txBody>
+          <a:bodyPr wrap="square" rtlCol="0">
+            <a:spAutoFit/>
+          </a:bodyPr>
+          <a:lstStyle/>
+          <a:p>
+            <a:r>
+              <a:rPr lang="ko-KR" altLang="en-US" sz="3200" dirty="0"/>
+              <a:t>주요 기능 </a:t>
+            </a:r>
+            <a:r>
+              <a:rPr lang="en-US" altLang="ko-KR" sz="3200" dirty="0"/>
+              <a:t>– </a:t>
+            </a:r>
+            <a:r>
+              <a:rPr lang="ko-KR" altLang="en-US" sz="3200" dirty="0"/>
+              <a:t>거래 및 입출금</a:t>
+            </a:r>
+          </a:p>
+        </p:txBody>
+      </p:sp>
+      <p:sp>
+        <p:nvSpPr>
+          <p:cNvPr id="7" name="TextBox 6">
+            <a:extLst>
+              <a:ext uri="{FF2B5EF4-FFF2-40B4-BE49-F238E27FC236}">
+                <a16:creationId xmlns:a16="http://schemas.microsoft.com/office/drawing/2014/main" id="{EA69879B-A1C8-E731-4158-193ABF552B2B}"/>
+              </a:ext>
+            </a:extLst>
+          </p:cNvPr>
+          <p:cNvSpPr txBox="1"/>
+          <p:nvPr/>
+        </p:nvSpPr>
+        <p:spPr>
+          <a:xfrm>
+            <a:off x="468921" y="945115"/>
+            <a:ext cx="9038759" cy="369332"/>
+          </a:xfrm>
+          <a:prstGeom prst="rect">
+            <a:avLst/>
+          </a:prstGeom>
+          <a:noFill/>
+        </p:spPr>
+        <p:txBody>
+          <a:bodyPr wrap="square" rtlCol="0">
+            <a:spAutoFit/>
+          </a:bodyPr>
+          <a:lstStyle/>
+          <a:p>
+            <a:r>
+              <a:rPr lang="en-US" altLang="ko-KR" dirty="0"/>
+              <a:t>TransactionBalanceService.java – </a:t>
+            </a:r>
+            <a:r>
+              <a:rPr lang="en-US" altLang="ko-KR" dirty="0" err="1"/>
+              <a:t>checkBalance</a:t>
+            </a:r>
+            <a:r>
+              <a:rPr lang="en-US" altLang="ko-KR" dirty="0"/>
+              <a:t>() </a:t>
+            </a:r>
+            <a:endParaRPr lang="ko-KR" altLang="en-US" dirty="0"/>
+          </a:p>
+        </p:txBody>
+      </p:sp>
+      <p:sp>
+        <p:nvSpPr>
+          <p:cNvPr id="5" name="TextBox 4">
+            <a:extLst>
+              <a:ext uri="{FF2B5EF4-FFF2-40B4-BE49-F238E27FC236}">
+                <a16:creationId xmlns:a16="http://schemas.microsoft.com/office/drawing/2014/main" id="{4F8BCC7B-D0A5-0FC2-849E-7DDF424DA256}"/>
+              </a:ext>
+            </a:extLst>
+          </p:cNvPr>
+          <p:cNvSpPr txBox="1"/>
+          <p:nvPr/>
+        </p:nvSpPr>
+        <p:spPr>
+          <a:xfrm>
+            <a:off x="6376638" y="2824775"/>
+            <a:ext cx="5424055" cy="1200329"/>
+          </a:xfrm>
+          <a:prstGeom prst="rect">
+            <a:avLst/>
+          </a:prstGeom>
+          <a:noFill/>
+        </p:spPr>
+        <p:txBody>
+          <a:bodyPr wrap="square" rtlCol="0">
+            <a:spAutoFit/>
+          </a:bodyPr>
+          <a:lstStyle/>
+          <a:p>
+            <a:r>
+              <a:rPr lang="ko-KR" altLang="en-US" dirty="0">
+                <a:latin typeface="+mn-ea"/>
+              </a:rPr>
+              <a:t>계좌 번호를 받아 내장 메서드로 계좌 객체를 가져오고 그 계좌의 잔액을 반환하는 메서드</a:t>
+            </a:r>
+            <a:endParaRPr lang="ko-KR" altLang="ko-KR" dirty="0">
+              <a:latin typeface="+mn-ea"/>
+            </a:endParaRPr>
+          </a:p>
+          <a:p>
+            <a:endParaRPr lang="ko-KR" altLang="en-US" dirty="0">
+              <a:latin typeface="+mn-ea"/>
+            </a:endParaRPr>
+          </a:p>
+          <a:p>
+            <a:r>
+              <a:rPr lang="ko-KR" altLang="en-US" dirty="0">
+                <a:latin typeface="+mn-ea"/>
+              </a:rPr>
+              <a:t>요약 =&gt; 계좌번호로 계좌 잔액을 조회한다.</a:t>
+            </a:r>
+          </a:p>
+        </p:txBody>
+      </p:sp>
+      <p:sp>
+        <p:nvSpPr>
+          <p:cNvPr id="3" name="TextBox 2">
+            <a:extLst>
+              <a:ext uri="{FF2B5EF4-FFF2-40B4-BE49-F238E27FC236}">
+                <a16:creationId xmlns:a16="http://schemas.microsoft.com/office/drawing/2014/main" id="{A4664712-51E2-5C7D-5BF9-FAB0CC34C049}"/>
+              </a:ext>
+            </a:extLst>
+          </p:cNvPr>
+          <p:cNvSpPr txBox="1"/>
+          <p:nvPr/>
+        </p:nvSpPr>
+        <p:spPr>
+          <a:xfrm>
+            <a:off x="468921" y="2686276"/>
+            <a:ext cx="6096000" cy="1477328"/>
+          </a:xfrm>
+          <a:prstGeom prst="rect">
+            <a:avLst/>
+          </a:prstGeom>
+          <a:noFill/>
+        </p:spPr>
+        <p:txBody>
+          <a:bodyPr wrap="square">
+            <a:spAutoFit/>
+          </a:bodyPr>
+          <a:lstStyle/>
+          <a:p>
+            <a:pPr>
+              <a:buNone/>
+            </a:pPr>
+            <a:r>
+              <a:rPr lang="en-US" altLang="ko-KR" sz="1800" dirty="0">
+                <a:solidFill>
+                  <a:srgbClr val="E5C07B"/>
+                </a:solidFill>
+                <a:effectLst/>
+                <a:latin typeface="D2Coding" panose="020B0609020101020101" pitchFamily="49" charset="-127"/>
+                <a:ea typeface="D2Coding" panose="020B0609020101020101" pitchFamily="49" charset="-127"/>
+              </a:rPr>
+              <a:t>@Override</a:t>
+            </a:r>
+            <a:br>
+              <a:rPr lang="en-US" altLang="ko-KR" sz="1800" dirty="0">
+                <a:solidFill>
+                  <a:srgbClr val="E5C07B"/>
+                </a:solidFill>
+                <a:effectLst/>
+                <a:latin typeface="D2Coding" panose="020B0609020101020101" pitchFamily="49" charset="-127"/>
+                <a:ea typeface="D2Coding" panose="020B0609020101020101" pitchFamily="49" charset="-127"/>
+              </a:rPr>
+            </a:br>
+            <a:r>
+              <a:rPr lang="en-US" altLang="ko-KR" sz="1800" dirty="0">
+                <a:solidFill>
+                  <a:srgbClr val="D55FDE"/>
+                </a:solidFill>
+                <a:effectLst/>
+                <a:latin typeface="D2Coding" panose="020B0609020101020101" pitchFamily="49" charset="-127"/>
+                <a:ea typeface="D2Coding" panose="020B0609020101020101" pitchFamily="49" charset="-127"/>
+              </a:rPr>
+              <a:t>public long </a:t>
+            </a:r>
+            <a:r>
+              <a:rPr lang="en-US" altLang="ko-KR" sz="1800" dirty="0" err="1">
+                <a:solidFill>
+                  <a:srgbClr val="61AFEF"/>
+                </a:solidFill>
+                <a:effectLst/>
+                <a:latin typeface="D2Coding" panose="020B0609020101020101" pitchFamily="49" charset="-127"/>
+                <a:ea typeface="D2Coding" panose="020B0609020101020101" pitchFamily="49" charset="-127"/>
+              </a:rPr>
+              <a:t>checkBalance</a:t>
+            </a:r>
+            <a:r>
+              <a:rPr lang="en-US" altLang="ko-KR" sz="1800" dirty="0">
+                <a:solidFill>
+                  <a:srgbClr val="BBBBBB"/>
+                </a:solidFill>
+                <a:effectLst/>
+                <a:latin typeface="D2Coding" panose="020B0609020101020101" pitchFamily="49" charset="-127"/>
+                <a:ea typeface="D2Coding" panose="020B0609020101020101" pitchFamily="49" charset="-127"/>
+              </a:rPr>
+              <a:t>(</a:t>
+            </a:r>
+            <a:r>
+              <a:rPr lang="en-US" altLang="ko-KR" sz="1800" dirty="0">
+                <a:solidFill>
+                  <a:srgbClr val="E5C07B"/>
+                </a:solidFill>
+                <a:effectLst/>
+                <a:latin typeface="D2Coding" panose="020B0609020101020101" pitchFamily="49" charset="-127"/>
+                <a:ea typeface="D2Coding" panose="020B0609020101020101" pitchFamily="49" charset="-127"/>
+              </a:rPr>
+              <a:t>String </a:t>
+            </a:r>
+            <a:r>
+              <a:rPr lang="en-US" altLang="ko-KR" sz="1800" dirty="0" err="1">
+                <a:solidFill>
+                  <a:srgbClr val="D19A66"/>
+                </a:solidFill>
+                <a:effectLst/>
+                <a:latin typeface="D2Coding" panose="020B0609020101020101" pitchFamily="49" charset="-127"/>
+                <a:ea typeface="D2Coding" panose="020B0609020101020101" pitchFamily="49" charset="-127"/>
+              </a:rPr>
+              <a:t>accountNo</a:t>
+            </a:r>
+            <a:r>
+              <a:rPr lang="en-US" altLang="ko-KR" sz="1800" dirty="0">
+                <a:solidFill>
+                  <a:srgbClr val="BBBBBB"/>
+                </a:solidFill>
+                <a:effectLst/>
+                <a:latin typeface="D2Coding" panose="020B0609020101020101" pitchFamily="49" charset="-127"/>
+                <a:ea typeface="D2Coding" panose="020B0609020101020101" pitchFamily="49" charset="-127"/>
+              </a:rPr>
+              <a:t>) {</a:t>
+            </a:r>
+            <a:br>
+              <a:rPr lang="en-US" altLang="ko-KR" sz="1800" dirty="0">
+                <a:solidFill>
+                  <a:srgbClr val="BBBBBB"/>
+                </a:solidFill>
+                <a:effectLst/>
+                <a:latin typeface="D2Coding" panose="020B0609020101020101" pitchFamily="49" charset="-127"/>
+                <a:ea typeface="D2Coding" panose="020B0609020101020101" pitchFamily="49" charset="-127"/>
+              </a:rPr>
+            </a:br>
+            <a:r>
+              <a:rPr lang="en-US" altLang="ko-KR" sz="1800" dirty="0">
+                <a:solidFill>
+                  <a:srgbClr val="BBBBBB"/>
+                </a:solidFill>
+                <a:effectLst/>
+                <a:latin typeface="D2Coding" panose="020B0609020101020101" pitchFamily="49" charset="-127"/>
+                <a:ea typeface="D2Coding" panose="020B0609020101020101" pitchFamily="49" charset="-127"/>
+              </a:rPr>
+              <a:t>    </a:t>
+            </a:r>
+            <a:r>
+              <a:rPr lang="en-US" altLang="ko-KR" sz="1800" dirty="0">
+                <a:solidFill>
+                  <a:srgbClr val="E5C07B"/>
+                </a:solidFill>
+                <a:effectLst/>
+                <a:latin typeface="D2Coding" panose="020B0609020101020101" pitchFamily="49" charset="-127"/>
+                <a:ea typeface="D2Coding" panose="020B0609020101020101" pitchFamily="49" charset="-127"/>
+              </a:rPr>
+              <a:t>Account </a:t>
+            </a:r>
+            <a:r>
+              <a:rPr lang="en-US" altLang="ko-KR" sz="1800" dirty="0" err="1">
+                <a:solidFill>
+                  <a:srgbClr val="BBBBBB"/>
+                </a:solidFill>
+                <a:effectLst/>
+                <a:latin typeface="D2Coding" panose="020B0609020101020101" pitchFamily="49" charset="-127"/>
+                <a:ea typeface="D2Coding" panose="020B0609020101020101" pitchFamily="49" charset="-127"/>
+              </a:rPr>
+              <a:t>account</a:t>
+            </a:r>
+            <a:r>
+              <a:rPr lang="en-US" altLang="ko-KR" sz="1800" dirty="0">
+                <a:solidFill>
+                  <a:srgbClr val="BBBBBB"/>
+                </a:solidFill>
+                <a:effectLst/>
+                <a:latin typeface="D2Coding" panose="020B0609020101020101" pitchFamily="49" charset="-127"/>
+                <a:ea typeface="D2Coding" panose="020B0609020101020101" pitchFamily="49" charset="-127"/>
+              </a:rPr>
+              <a:t> = </a:t>
+            </a:r>
+            <a:r>
+              <a:rPr lang="en-US" altLang="ko-KR" sz="1800" dirty="0" err="1">
+                <a:solidFill>
+                  <a:srgbClr val="61AFEF"/>
+                </a:solidFill>
+                <a:effectLst/>
+                <a:latin typeface="D2Coding" panose="020B0609020101020101" pitchFamily="49" charset="-127"/>
+                <a:ea typeface="D2Coding" panose="020B0609020101020101" pitchFamily="49" charset="-127"/>
+              </a:rPr>
+              <a:t>findAccount</a:t>
+            </a:r>
+            <a:r>
+              <a:rPr lang="en-US" altLang="ko-KR" sz="1800" dirty="0">
+                <a:solidFill>
+                  <a:srgbClr val="BBBBBB"/>
+                </a:solidFill>
+                <a:effectLst/>
+                <a:latin typeface="D2Coding" panose="020B0609020101020101" pitchFamily="49" charset="-127"/>
+                <a:ea typeface="D2Coding" panose="020B0609020101020101" pitchFamily="49" charset="-127"/>
+              </a:rPr>
+              <a:t>(</a:t>
+            </a:r>
+            <a:r>
+              <a:rPr lang="en-US" altLang="ko-KR" sz="1800" dirty="0" err="1">
+                <a:solidFill>
+                  <a:srgbClr val="D19A66"/>
+                </a:solidFill>
+                <a:effectLst/>
+                <a:latin typeface="D2Coding" panose="020B0609020101020101" pitchFamily="49" charset="-127"/>
+                <a:ea typeface="D2Coding" panose="020B0609020101020101" pitchFamily="49" charset="-127"/>
+              </a:rPr>
+              <a:t>accountNo</a:t>
+            </a:r>
+            <a:r>
+              <a:rPr lang="en-US" altLang="ko-KR" sz="1800" dirty="0">
+                <a:solidFill>
+                  <a:srgbClr val="BBBBBB"/>
+                </a:solidFill>
+                <a:effectLst/>
+                <a:latin typeface="D2Coding" panose="020B0609020101020101" pitchFamily="49" charset="-127"/>
+                <a:ea typeface="D2Coding" panose="020B0609020101020101" pitchFamily="49" charset="-127"/>
+              </a:rPr>
+              <a:t>);</a:t>
+            </a:r>
+            <a:br>
+              <a:rPr lang="en-US" altLang="ko-KR" sz="1800" dirty="0">
+                <a:solidFill>
+                  <a:srgbClr val="BBBBBB"/>
+                </a:solidFill>
+                <a:effectLst/>
+                <a:latin typeface="D2Coding" panose="020B0609020101020101" pitchFamily="49" charset="-127"/>
+                <a:ea typeface="D2Coding" panose="020B0609020101020101" pitchFamily="49" charset="-127"/>
+              </a:rPr>
+            </a:br>
+            <a:r>
+              <a:rPr lang="en-US" altLang="ko-KR" sz="1800" dirty="0">
+                <a:solidFill>
+                  <a:srgbClr val="BBBBBB"/>
+                </a:solidFill>
+                <a:effectLst/>
+                <a:latin typeface="D2Coding" panose="020B0609020101020101" pitchFamily="49" charset="-127"/>
+                <a:ea typeface="D2Coding" panose="020B0609020101020101" pitchFamily="49" charset="-127"/>
+              </a:rPr>
+              <a:t>    </a:t>
+            </a:r>
+            <a:r>
+              <a:rPr lang="en-US" altLang="ko-KR" sz="1800" dirty="0">
+                <a:solidFill>
+                  <a:srgbClr val="D55FDE"/>
+                </a:solidFill>
+                <a:effectLst/>
+                <a:latin typeface="D2Coding" panose="020B0609020101020101" pitchFamily="49" charset="-127"/>
+                <a:ea typeface="D2Coding" panose="020B0609020101020101" pitchFamily="49" charset="-127"/>
+              </a:rPr>
+              <a:t>return </a:t>
+            </a:r>
+            <a:r>
+              <a:rPr lang="en-US" altLang="ko-KR" sz="1800" dirty="0" err="1">
+                <a:solidFill>
+                  <a:srgbClr val="BBBBBB"/>
+                </a:solidFill>
+                <a:effectLst/>
+                <a:latin typeface="D2Coding" panose="020B0609020101020101" pitchFamily="49" charset="-127"/>
+                <a:ea typeface="D2Coding" panose="020B0609020101020101" pitchFamily="49" charset="-127"/>
+              </a:rPr>
+              <a:t>account.</a:t>
+            </a:r>
+            <a:r>
+              <a:rPr lang="en-US" altLang="ko-KR" sz="1800" dirty="0" err="1">
+                <a:solidFill>
+                  <a:srgbClr val="61AFEF"/>
+                </a:solidFill>
+                <a:effectLst/>
+                <a:latin typeface="D2Coding" panose="020B0609020101020101" pitchFamily="49" charset="-127"/>
+                <a:ea typeface="D2Coding" panose="020B0609020101020101" pitchFamily="49" charset="-127"/>
+              </a:rPr>
+              <a:t>getBalance</a:t>
+            </a:r>
+            <a:r>
+              <a:rPr lang="en-US" altLang="ko-KR" sz="1800" dirty="0">
+                <a:solidFill>
+                  <a:srgbClr val="BBBBBB"/>
+                </a:solidFill>
+                <a:effectLst/>
+                <a:latin typeface="D2Coding" panose="020B0609020101020101" pitchFamily="49" charset="-127"/>
+                <a:ea typeface="D2Coding" panose="020B0609020101020101" pitchFamily="49" charset="-127"/>
+              </a:rPr>
+              <a:t>();</a:t>
+            </a:r>
+            <a:br>
+              <a:rPr lang="en-US" altLang="ko-KR" sz="1800" dirty="0">
+                <a:solidFill>
+                  <a:srgbClr val="BBBBBB"/>
+                </a:solidFill>
+                <a:effectLst/>
+                <a:latin typeface="D2Coding" panose="020B0609020101020101" pitchFamily="49" charset="-127"/>
+                <a:ea typeface="D2Coding" panose="020B0609020101020101" pitchFamily="49" charset="-127"/>
+              </a:rPr>
+            </a:br>
+            <a:r>
+              <a:rPr lang="en-US" altLang="ko-KR" sz="1800" dirty="0">
+                <a:solidFill>
+                  <a:srgbClr val="BBBBBB"/>
+                </a:solidFill>
+                <a:effectLst/>
+                <a:latin typeface="D2Coding" panose="020B0609020101020101" pitchFamily="49" charset="-127"/>
+                <a:ea typeface="D2Coding" panose="020B0609020101020101" pitchFamily="49" charset="-127"/>
+              </a:rPr>
+              <a:t>}</a:t>
+            </a:r>
+          </a:p>
+        </p:txBody>
+      </p:sp>
+    </p:spTree>
+    <p:extLst>
+      <p:ext uri="{BB962C8B-B14F-4D97-AF65-F5344CB8AC3E}">
+        <p14:creationId xmlns:p14="http://schemas.microsoft.com/office/powerpoint/2010/main" val="2706144030"/>
+      </p:ext>
+    </p:extLst>
+  </p:cSld>
+  <p:clrMapOvr>
+    <a:masterClrMapping/>
+  </p:clrMapOvr>
+</p:sld>
+</file>
+
+<file path=ppt/slides/slide35.xml><?xml version="1.0" encoding="utf-8"?>
+<p:sld xmlns:a="http://schemas.openxmlformats.org/drawingml/2006/main" xmlns:r="http://schemas.openxmlformats.org/officeDocument/2006/relationships" xmlns:p="http://schemas.openxmlformats.org/presentationml/2006/main">
+  <p:cSld>
+    <p:spTree>
+      <p:nvGrpSpPr>
+        <p:cNvPr id="1" name="">
+          <a:extLst>
+            <a:ext uri="{FF2B5EF4-FFF2-40B4-BE49-F238E27FC236}">
               <a16:creationId xmlns:a16="http://schemas.microsoft.com/office/drawing/2014/main" id="{E23A3922-5460-D0D2-9FA9-33268A108002}"/>
             </a:ext>
           </a:extLst>
@@ -27030,7 +27512,7 @@
 </p:sld>
 </file>
 
-<file path=ppt/slides/slide35.xml><?xml version="1.0" encoding="utf-8"?>
+<file path=ppt/slides/slide36.xml><?xml version="1.0" encoding="utf-8"?>
 <p:sld xmlns:a="http://schemas.openxmlformats.org/drawingml/2006/main" xmlns:r="http://schemas.openxmlformats.org/officeDocument/2006/relationships" xmlns:p="http://schemas.openxmlformats.org/presentationml/2006/main">
   <p:cSld>
     <p:spTree>
@@ -28210,7 +28692,7 @@
 </p:sld>
 </file>
 
-<file path=ppt/slides/slide36.xml><?xml version="1.0" encoding="utf-8"?>
+<file path=ppt/slides/slide37.xml><?xml version="1.0" encoding="utf-8"?>
 <p:sld xmlns:a="http://schemas.openxmlformats.org/drawingml/2006/main" xmlns:r="http://schemas.openxmlformats.org/officeDocument/2006/relationships" xmlns:p="http://schemas.openxmlformats.org/presentationml/2006/main">
   <p:cSld>
     <p:spTree>
@@ -29484,7 +29966,7 @@
 </p:sld>
 </file>
 
-<file path=ppt/slides/slide37.xml><?xml version="1.0" encoding="utf-8"?>
+<file path=ppt/slides/slide38.xml><?xml version="1.0" encoding="utf-8"?>
 <p:sld xmlns:a="http://schemas.openxmlformats.org/drawingml/2006/main" xmlns:r="http://schemas.openxmlformats.org/officeDocument/2006/relationships" xmlns:p="http://schemas.openxmlformats.org/presentationml/2006/main">
   <p:cSld>
     <p:spTree>
@@ -30268,7 +30750,7 @@
 </p:sld>
 </file>
 
-<file path=ppt/slides/slide38.xml><?xml version="1.0" encoding="utf-8"?>
+<file path=ppt/slides/slide39.xml><?xml version="1.0" encoding="utf-8"?>
 <p:sld xmlns:a="http://schemas.openxmlformats.org/drawingml/2006/main" xmlns:r="http://schemas.openxmlformats.org/officeDocument/2006/relationships" xmlns:p="http://schemas.openxmlformats.org/presentationml/2006/main">
   <p:cSld>
     <p:spTree>
@@ -31801,7 +32283,164 @@
 </p:sld>
 </file>
 
-<file path=ppt/slides/slide39.xml><?xml version="1.0" encoding="utf-8"?>
+<file path=ppt/slides/slide4.xml><?xml version="1.0" encoding="utf-8"?>
+<p:sld xmlns:a="http://schemas.openxmlformats.org/drawingml/2006/main" xmlns:r="http://schemas.openxmlformats.org/officeDocument/2006/relationships" xmlns:p="http://schemas.openxmlformats.org/presentationml/2006/main">
+  <p:cSld>
+    <p:spTree>
+      <p:nvGrpSpPr>
+        <p:cNvPr id="1" name="">
+          <a:extLst>
+            <a:ext uri="{FF2B5EF4-FFF2-40B4-BE49-F238E27FC236}">
+              <a16:creationId xmlns:a16="http://schemas.microsoft.com/office/drawing/2014/main" id="{625E8FBA-BFB3-1C71-BFD7-3AC2B6ECB536}"/>
+            </a:ext>
+          </a:extLst>
+        </p:cNvPr>
+        <p:cNvGrpSpPr/>
+        <p:nvPr/>
+      </p:nvGrpSpPr>
+      <p:grpSpPr>
+        <a:xfrm>
+          <a:off x="0" y="0"/>
+          <a:ext cx="0" cy="0"/>
+          <a:chOff x="0" y="0"/>
+          <a:chExt cx="0" cy="0"/>
+        </a:xfrm>
+      </p:grpSpPr>
+      <p:sp>
+        <p:nvSpPr>
+          <p:cNvPr id="18" name="TextBox 17">
+            <a:extLst>
+              <a:ext uri="{FF2B5EF4-FFF2-40B4-BE49-F238E27FC236}">
+                <a16:creationId xmlns:a16="http://schemas.microsoft.com/office/drawing/2014/main" id="{76BC9095-2556-2717-AF21-16392620800A}"/>
+              </a:ext>
+            </a:extLst>
+          </p:cNvPr>
+          <p:cNvSpPr txBox="1"/>
+          <p:nvPr/>
+        </p:nvSpPr>
+        <p:spPr>
+          <a:xfrm>
+            <a:off x="328246" y="377952"/>
+            <a:ext cx="2362999" cy="584775"/>
+          </a:xfrm>
+          <a:prstGeom prst="rect">
+            <a:avLst/>
+          </a:prstGeom>
+          <a:noFill/>
+        </p:spPr>
+        <p:txBody>
+          <a:bodyPr wrap="square" rtlCol="0">
+            <a:spAutoFit/>
+          </a:bodyPr>
+          <a:lstStyle/>
+          <a:p>
+            <a:r>
+              <a:rPr lang="ko-KR" altLang="en-US" sz="3200">
+                <a:latin typeface="+mj-lt"/>
+              </a:rPr>
+              <a:t>프로젝트 개요</a:t>
+            </a:r>
+            <a:endParaRPr lang="ko-KR" altLang="en-US" sz="3200" dirty="0">
+              <a:latin typeface="+mj-lt"/>
+            </a:endParaRPr>
+          </a:p>
+        </p:txBody>
+      </p:sp>
+      <p:pic>
+        <p:nvPicPr>
+          <p:cNvPr id="5" name="그림 4">
+            <a:extLst>
+              <a:ext uri="{FF2B5EF4-FFF2-40B4-BE49-F238E27FC236}">
+                <a16:creationId xmlns:a16="http://schemas.microsoft.com/office/drawing/2014/main" id="{D88DAEDB-D7E5-D156-6041-28F1C4D115ED}"/>
+              </a:ext>
+            </a:extLst>
+          </p:cNvPr>
+          <p:cNvPicPr>
+            <a:picLocks noChangeAspect="1"/>
+          </p:cNvPicPr>
+          <p:nvPr/>
+        </p:nvPicPr>
+        <p:blipFill>
+          <a:blip r:embed="rId2">
+            <a:extLst>
+              <a:ext uri="{28A0092B-C50C-407E-A947-70E740481C1C}">
+                <a14:useLocalDpi xmlns:a14="http://schemas.microsoft.com/office/drawing/2010/main" val="0"/>
+              </a:ext>
+            </a:extLst>
+          </a:blip>
+          <a:stretch>
+            <a:fillRect/>
+          </a:stretch>
+        </p:blipFill>
+        <p:spPr>
+          <a:xfrm>
+            <a:off x="3292426" y="1632813"/>
+            <a:ext cx="5354900" cy="5354900"/>
+          </a:xfrm>
+          <a:prstGeom prst="rect">
+            <a:avLst/>
+          </a:prstGeom>
+        </p:spPr>
+      </p:pic>
+      <p:sp>
+        <p:nvSpPr>
+          <p:cNvPr id="6" name="TextBox 5">
+            <a:extLst>
+              <a:ext uri="{FF2B5EF4-FFF2-40B4-BE49-F238E27FC236}">
+                <a16:creationId xmlns:a16="http://schemas.microsoft.com/office/drawing/2014/main" id="{DA5D0F7D-B4F1-C8CB-9F02-9C1028D109E5}"/>
+              </a:ext>
+            </a:extLst>
+          </p:cNvPr>
+          <p:cNvSpPr txBox="1"/>
+          <p:nvPr/>
+        </p:nvSpPr>
+        <p:spPr>
+          <a:xfrm>
+            <a:off x="1241714" y="1340426"/>
+            <a:ext cx="9708573" cy="584775"/>
+          </a:xfrm>
+          <a:prstGeom prst="rect">
+            <a:avLst/>
+          </a:prstGeom>
+          <a:noFill/>
+        </p:spPr>
+        <p:txBody>
+          <a:bodyPr wrap="square" rtlCol="0">
+            <a:spAutoFit/>
+          </a:bodyPr>
+          <a:lstStyle/>
+          <a:p>
+            <a:pPr algn="ctr"/>
+            <a:r>
+              <a:rPr lang="en-US" altLang="ko-KR" sz="3200" dirty="0"/>
+              <a:t>ATM</a:t>
+            </a:r>
+            <a:r>
+              <a:rPr lang="ko-KR" altLang="en-US" sz="3200" dirty="0"/>
+              <a:t> 관리 프로그램을 만들며 그동안 배운 것을 활용해 본다</a:t>
+            </a:r>
+            <a:r>
+              <a:rPr lang="en-US" altLang="ko-KR" sz="3200" dirty="0"/>
+              <a:t>.</a:t>
+            </a:r>
+            <a:endParaRPr lang="ko-KR" altLang="en-US" sz="3200" dirty="0"/>
+          </a:p>
+        </p:txBody>
+      </p:sp>
+    </p:spTree>
+    <p:extLst>
+      <p:ext uri="{BB962C8B-B14F-4D97-AF65-F5344CB8AC3E}">
+        <p14:creationId xmlns:p14="http://schemas.microsoft.com/office/powerpoint/2010/main" val="534644589"/>
+      </p:ext>
+    </p:extLst>
+  </p:cSld>
+  <p:clrMapOvr>
+    <a:masterClrMapping/>
+  </p:clrMapOvr>
+</p:sld>
+</file>
+
+<file path=ppt/slides/slide40.xml><?xml version="1.0" encoding="utf-8"?>
 <p:sld xmlns:a="http://schemas.openxmlformats.org/drawingml/2006/main" xmlns:r="http://schemas.openxmlformats.org/officeDocument/2006/relationships" xmlns:p="http://schemas.openxmlformats.org/presentationml/2006/main">
   <p:cSld>
     <p:spTree>
@@ -32242,164 +32881,7 @@
 </p:sld>
 </file>
 
-<file path=ppt/slides/slide4.xml><?xml version="1.0" encoding="utf-8"?>
-<p:sld xmlns:a="http://schemas.openxmlformats.org/drawingml/2006/main" xmlns:r="http://schemas.openxmlformats.org/officeDocument/2006/relationships" xmlns:p="http://schemas.openxmlformats.org/presentationml/2006/main">
-  <p:cSld>
-    <p:spTree>
-      <p:nvGrpSpPr>
-        <p:cNvPr id="1" name="">
-          <a:extLst>
-            <a:ext uri="{FF2B5EF4-FFF2-40B4-BE49-F238E27FC236}">
-              <a16:creationId xmlns:a16="http://schemas.microsoft.com/office/drawing/2014/main" id="{625E8FBA-BFB3-1C71-BFD7-3AC2B6ECB536}"/>
-            </a:ext>
-          </a:extLst>
-        </p:cNvPr>
-        <p:cNvGrpSpPr/>
-        <p:nvPr/>
-      </p:nvGrpSpPr>
-      <p:grpSpPr>
-        <a:xfrm>
-          <a:off x="0" y="0"/>
-          <a:ext cx="0" cy="0"/>
-          <a:chOff x="0" y="0"/>
-          <a:chExt cx="0" cy="0"/>
-        </a:xfrm>
-      </p:grpSpPr>
-      <p:sp>
-        <p:nvSpPr>
-          <p:cNvPr id="18" name="TextBox 17">
-            <a:extLst>
-              <a:ext uri="{FF2B5EF4-FFF2-40B4-BE49-F238E27FC236}">
-                <a16:creationId xmlns:a16="http://schemas.microsoft.com/office/drawing/2014/main" id="{76BC9095-2556-2717-AF21-16392620800A}"/>
-              </a:ext>
-            </a:extLst>
-          </p:cNvPr>
-          <p:cNvSpPr txBox="1"/>
-          <p:nvPr/>
-        </p:nvSpPr>
-        <p:spPr>
-          <a:xfrm>
-            <a:off x="328246" y="377952"/>
-            <a:ext cx="2362999" cy="584775"/>
-          </a:xfrm>
-          <a:prstGeom prst="rect">
-            <a:avLst/>
-          </a:prstGeom>
-          <a:noFill/>
-        </p:spPr>
-        <p:txBody>
-          <a:bodyPr wrap="square" rtlCol="0">
-            <a:spAutoFit/>
-          </a:bodyPr>
-          <a:lstStyle/>
-          <a:p>
-            <a:r>
-              <a:rPr lang="ko-KR" altLang="en-US" sz="3200">
-                <a:latin typeface="+mj-lt"/>
-              </a:rPr>
-              <a:t>프로젝트 개요</a:t>
-            </a:r>
-            <a:endParaRPr lang="ko-KR" altLang="en-US" sz="3200" dirty="0">
-              <a:latin typeface="+mj-lt"/>
-            </a:endParaRPr>
-          </a:p>
-        </p:txBody>
-      </p:sp>
-      <p:pic>
-        <p:nvPicPr>
-          <p:cNvPr id="5" name="그림 4">
-            <a:extLst>
-              <a:ext uri="{FF2B5EF4-FFF2-40B4-BE49-F238E27FC236}">
-                <a16:creationId xmlns:a16="http://schemas.microsoft.com/office/drawing/2014/main" id="{D88DAEDB-D7E5-D156-6041-28F1C4D115ED}"/>
-              </a:ext>
-            </a:extLst>
-          </p:cNvPr>
-          <p:cNvPicPr>
-            <a:picLocks noChangeAspect="1"/>
-          </p:cNvPicPr>
-          <p:nvPr/>
-        </p:nvPicPr>
-        <p:blipFill>
-          <a:blip r:embed="rId2">
-            <a:extLst>
-              <a:ext uri="{28A0092B-C50C-407E-A947-70E740481C1C}">
-                <a14:useLocalDpi xmlns:a14="http://schemas.microsoft.com/office/drawing/2010/main" val="0"/>
-              </a:ext>
-            </a:extLst>
-          </a:blip>
-          <a:stretch>
-            <a:fillRect/>
-          </a:stretch>
-        </p:blipFill>
-        <p:spPr>
-          <a:xfrm>
-            <a:off x="3292426" y="1632813"/>
-            <a:ext cx="5354900" cy="5354900"/>
-          </a:xfrm>
-          <a:prstGeom prst="rect">
-            <a:avLst/>
-          </a:prstGeom>
-        </p:spPr>
-      </p:pic>
-      <p:sp>
-        <p:nvSpPr>
-          <p:cNvPr id="6" name="TextBox 5">
-            <a:extLst>
-              <a:ext uri="{FF2B5EF4-FFF2-40B4-BE49-F238E27FC236}">
-                <a16:creationId xmlns:a16="http://schemas.microsoft.com/office/drawing/2014/main" id="{DA5D0F7D-B4F1-C8CB-9F02-9C1028D109E5}"/>
-              </a:ext>
-            </a:extLst>
-          </p:cNvPr>
-          <p:cNvSpPr txBox="1"/>
-          <p:nvPr/>
-        </p:nvSpPr>
-        <p:spPr>
-          <a:xfrm>
-            <a:off x="1241714" y="1340426"/>
-            <a:ext cx="9708573" cy="584775"/>
-          </a:xfrm>
-          <a:prstGeom prst="rect">
-            <a:avLst/>
-          </a:prstGeom>
-          <a:noFill/>
-        </p:spPr>
-        <p:txBody>
-          <a:bodyPr wrap="square" rtlCol="0">
-            <a:spAutoFit/>
-          </a:bodyPr>
-          <a:lstStyle/>
-          <a:p>
-            <a:pPr algn="ctr"/>
-            <a:r>
-              <a:rPr lang="en-US" altLang="ko-KR" sz="3200" dirty="0"/>
-              <a:t>ATM</a:t>
-            </a:r>
-            <a:r>
-              <a:rPr lang="ko-KR" altLang="en-US" sz="3200" dirty="0"/>
-              <a:t> 관리 프로그램을 만들며 그동안 배운 것을 활용해 본다</a:t>
-            </a:r>
-            <a:r>
-              <a:rPr lang="en-US" altLang="ko-KR" sz="3200" dirty="0"/>
-              <a:t>.</a:t>
-            </a:r>
-            <a:endParaRPr lang="ko-KR" altLang="en-US" sz="3200" dirty="0"/>
-          </a:p>
-        </p:txBody>
-      </p:sp>
-    </p:spTree>
-    <p:extLst>
-      <p:ext uri="{BB962C8B-B14F-4D97-AF65-F5344CB8AC3E}">
-        <p14:creationId xmlns:p14="http://schemas.microsoft.com/office/powerpoint/2010/main" val="534644589"/>
-      </p:ext>
-    </p:extLst>
-  </p:cSld>
-  <p:clrMapOvr>
-    <a:masterClrMapping/>
-  </p:clrMapOvr>
-</p:sld>
-</file>
-
-<file path=ppt/slides/slide40.xml><?xml version="1.0" encoding="utf-8"?>
+<file path=ppt/slides/slide41.xml><?xml version="1.0" encoding="utf-8"?>
 <p:sld xmlns:a="http://schemas.openxmlformats.org/drawingml/2006/main" xmlns:r="http://schemas.openxmlformats.org/officeDocument/2006/relationships" xmlns:p="http://schemas.openxmlformats.org/presentationml/2006/main">
   <p:cSld>
     <p:spTree>
@@ -32704,7 +33186,7 @@
 </p:sld>
 </file>
 
-<file path=ppt/slides/slide41.xml><?xml version="1.0" encoding="utf-8"?>
+<file path=ppt/slides/slide42.xml><?xml version="1.0" encoding="utf-8"?>
 <p:sld xmlns:a="http://schemas.openxmlformats.org/drawingml/2006/main" xmlns:r="http://schemas.openxmlformats.org/officeDocument/2006/relationships" xmlns:p="http://schemas.openxmlformats.org/presentationml/2006/main">
   <p:cSld>
     <p:spTree>
@@ -33780,7 +34262,7 @@
 </p:sld>
 </file>
 
-<file path=ppt/slides/slide42.xml><?xml version="1.0" encoding="utf-8"?>
+<file path=ppt/slides/slide43.xml><?xml version="1.0" encoding="utf-8"?>
 <p:sld xmlns:a="http://schemas.openxmlformats.org/drawingml/2006/main" xmlns:r="http://schemas.openxmlformats.org/officeDocument/2006/relationships" xmlns:p="http://schemas.openxmlformats.org/presentationml/2006/main">
   <p:cSld>
     <p:spTree>
@@ -34709,7 +35191,7 @@
 </p:sld>
 </file>
 
-<file path=ppt/slides/slide43.xml><?xml version="1.0" encoding="utf-8"?>
+<file path=ppt/slides/slide44.xml><?xml version="1.0" encoding="utf-8"?>
 <p:sld xmlns:a="http://schemas.openxmlformats.org/drawingml/2006/main" xmlns:r="http://schemas.openxmlformats.org/officeDocument/2006/relationships" xmlns:p="http://schemas.openxmlformats.org/presentationml/2006/main">
   <p:cSld>
     <p:spTree>
@@ -35072,7 +35554,7 @@
 </p:sld>
 </file>
 
-<file path=ppt/slides/slide44.xml><?xml version="1.0" encoding="utf-8"?>
+<file path=ppt/slides/slide45.xml><?xml version="1.0" encoding="utf-8"?>
 <p:sld xmlns:a="http://schemas.openxmlformats.org/drawingml/2006/main" xmlns:r="http://schemas.openxmlformats.org/officeDocument/2006/relationships" xmlns:p="http://schemas.openxmlformats.org/presentationml/2006/main">
   <p:cSld>
     <p:spTree>
@@ -35972,7 +36454,7 @@
 </p:sld>
 </file>
 
-<file path=ppt/slides/slide45.xml><?xml version="1.0" encoding="utf-8"?>
+<file path=ppt/slides/slide46.xml><?xml version="1.0" encoding="utf-8"?>
 <p:sld xmlns:a="http://schemas.openxmlformats.org/drawingml/2006/main" xmlns:r="http://schemas.openxmlformats.org/officeDocument/2006/relationships" xmlns:p="http://schemas.openxmlformats.org/presentationml/2006/main">
   <p:cSld>
     <p:spTree>
@@ -36899,7 +37381,7 @@
 </p:sld>
 </file>
 
-<file path=ppt/slides/slide46.xml><?xml version="1.0" encoding="utf-8"?>
+<file path=ppt/slides/slide47.xml><?xml version="1.0" encoding="utf-8"?>
 <p:sld xmlns:a="http://schemas.openxmlformats.org/drawingml/2006/main" xmlns:r="http://schemas.openxmlformats.org/officeDocument/2006/relationships" xmlns:p="http://schemas.openxmlformats.org/presentationml/2006/main">
   <p:cSld>
     <p:spTree>
@@ -37629,7 +38111,7 @@
 </p:sld>
 </file>
 
-<file path=ppt/slides/slide47.xml><?xml version="1.0" encoding="utf-8"?>
+<file path=ppt/slides/slide48.xml><?xml version="1.0" encoding="utf-8"?>
 <p:sld xmlns:a="http://schemas.openxmlformats.org/drawingml/2006/main" xmlns:r="http://schemas.openxmlformats.org/officeDocument/2006/relationships" xmlns:p="http://schemas.openxmlformats.org/presentationml/2006/main">
   <p:cSld>
     <p:spTree>
@@ -40983,7 +41465,7 @@
 </p:sld>
 </file>
 
-<file path=ppt/slides/slide48.xml><?xml version="1.0" encoding="utf-8"?>
+<file path=ppt/slides/slide49.xml><?xml version="1.0" encoding="utf-8"?>
 <p:sld xmlns:a="http://schemas.openxmlformats.org/drawingml/2006/main" xmlns:r="http://schemas.openxmlformats.org/officeDocument/2006/relationships" xmlns:p="http://schemas.openxmlformats.org/presentationml/2006/main">
   <p:cSld>
     <p:spTree>
@@ -42066,80 +42548,6 @@
     <p:extLst>
       <p:ext uri="{BB962C8B-B14F-4D97-AF65-F5344CB8AC3E}">
         <p14:creationId xmlns:p14="http://schemas.microsoft.com/office/powerpoint/2010/main" val="3186468707"/>
-      </p:ext>
-    </p:extLst>
-  </p:cSld>
-  <p:clrMapOvr>
-    <a:masterClrMapping/>
-  </p:clrMapOvr>
-</p:sld>
-</file>
-
-<file path=ppt/slides/slide49.xml><?xml version="1.0" encoding="utf-8"?>
-<p:sld xmlns:a="http://schemas.openxmlformats.org/drawingml/2006/main" xmlns:r="http://schemas.openxmlformats.org/officeDocument/2006/relationships" xmlns:p="http://schemas.openxmlformats.org/presentationml/2006/main">
-  <p:cSld>
-    <p:spTree>
-      <p:nvGrpSpPr>
-        <p:cNvPr id="1" name="">
-          <a:extLst>
-            <a:ext uri="{FF2B5EF4-FFF2-40B4-BE49-F238E27FC236}">
-              <a16:creationId xmlns:a16="http://schemas.microsoft.com/office/drawing/2014/main" id="{00313B2A-1DB5-2016-C045-8235E1283AC3}"/>
-            </a:ext>
-          </a:extLst>
-        </p:cNvPr>
-        <p:cNvGrpSpPr/>
-        <p:nvPr/>
-      </p:nvGrpSpPr>
-      <p:grpSpPr>
-        <a:xfrm>
-          <a:off x="0" y="0"/>
-          <a:ext cx="0" cy="0"/>
-          <a:chOff x="0" y="0"/>
-          <a:chExt cx="0" cy="0"/>
-        </a:xfrm>
-      </p:grpSpPr>
-      <p:sp>
-        <p:nvSpPr>
-          <p:cNvPr id="18" name="TextBox 17">
-            <a:extLst>
-              <a:ext uri="{FF2B5EF4-FFF2-40B4-BE49-F238E27FC236}">
-                <a16:creationId xmlns:a16="http://schemas.microsoft.com/office/drawing/2014/main" id="{73143FD1-C3AC-0A5B-EC9C-CBDBCA409908}"/>
-              </a:ext>
-            </a:extLst>
-          </p:cNvPr>
-          <p:cNvSpPr txBox="1"/>
-          <p:nvPr/>
-        </p:nvSpPr>
-        <p:spPr>
-          <a:xfrm>
-            <a:off x="2443275" y="1997839"/>
-            <a:ext cx="7305450" cy="2862322"/>
-          </a:xfrm>
-          <a:prstGeom prst="rect">
-            <a:avLst/>
-          </a:prstGeom>
-          <a:noFill/>
-        </p:spPr>
-        <p:txBody>
-          <a:bodyPr wrap="square" rtlCol="0">
-            <a:spAutoFit/>
-          </a:bodyPr>
-          <a:lstStyle/>
-          <a:p>
-            <a:pPr algn="ctr"/>
-            <a:r>
-              <a:rPr lang="ko-KR" altLang="en-US" sz="18000" dirty="0">
-                <a:latin typeface="+mj-lt"/>
-              </a:rPr>
-              <a:t>시연</a:t>
-            </a:r>
-          </a:p>
-        </p:txBody>
-      </p:sp>
-    </p:spTree>
-    <p:extLst>
-      <p:ext uri="{BB962C8B-B14F-4D97-AF65-F5344CB8AC3E}">
-        <p14:creationId xmlns:p14="http://schemas.microsoft.com/office/powerpoint/2010/main" val="3088974851"/>
       </p:ext>
     </p:extLst>
   </p:cSld>
@@ -43072,6 +43480,80 @@
         <p:cNvPr id="1" name="">
           <a:extLst>
             <a:ext uri="{FF2B5EF4-FFF2-40B4-BE49-F238E27FC236}">
+              <a16:creationId xmlns:a16="http://schemas.microsoft.com/office/drawing/2014/main" id="{00313B2A-1DB5-2016-C045-8235E1283AC3}"/>
+            </a:ext>
+          </a:extLst>
+        </p:cNvPr>
+        <p:cNvGrpSpPr/>
+        <p:nvPr/>
+      </p:nvGrpSpPr>
+      <p:grpSpPr>
+        <a:xfrm>
+          <a:off x="0" y="0"/>
+          <a:ext cx="0" cy="0"/>
+          <a:chOff x="0" y="0"/>
+          <a:chExt cx="0" cy="0"/>
+        </a:xfrm>
+      </p:grpSpPr>
+      <p:sp>
+        <p:nvSpPr>
+          <p:cNvPr id="18" name="TextBox 17">
+            <a:extLst>
+              <a:ext uri="{FF2B5EF4-FFF2-40B4-BE49-F238E27FC236}">
+                <a16:creationId xmlns:a16="http://schemas.microsoft.com/office/drawing/2014/main" id="{73143FD1-C3AC-0A5B-EC9C-CBDBCA409908}"/>
+              </a:ext>
+            </a:extLst>
+          </p:cNvPr>
+          <p:cNvSpPr txBox="1"/>
+          <p:nvPr/>
+        </p:nvSpPr>
+        <p:spPr>
+          <a:xfrm>
+            <a:off x="2443275" y="1997839"/>
+            <a:ext cx="7305450" cy="2862322"/>
+          </a:xfrm>
+          <a:prstGeom prst="rect">
+            <a:avLst/>
+          </a:prstGeom>
+          <a:noFill/>
+        </p:spPr>
+        <p:txBody>
+          <a:bodyPr wrap="square" rtlCol="0">
+            <a:spAutoFit/>
+          </a:bodyPr>
+          <a:lstStyle/>
+          <a:p>
+            <a:pPr algn="ctr"/>
+            <a:r>
+              <a:rPr lang="ko-KR" altLang="en-US" sz="18000" dirty="0">
+                <a:latin typeface="+mj-lt"/>
+              </a:rPr>
+              <a:t>시연</a:t>
+            </a:r>
+          </a:p>
+        </p:txBody>
+      </p:sp>
+    </p:spTree>
+    <p:extLst>
+      <p:ext uri="{BB962C8B-B14F-4D97-AF65-F5344CB8AC3E}">
+        <p14:creationId xmlns:p14="http://schemas.microsoft.com/office/powerpoint/2010/main" val="3088974851"/>
+      </p:ext>
+    </p:extLst>
+  </p:cSld>
+  <p:clrMapOvr>
+    <a:masterClrMapping/>
+  </p:clrMapOvr>
+</p:sld>
+</file>
+
+<file path=ppt/slides/slide51.xml><?xml version="1.0" encoding="utf-8"?>
+<p:sld xmlns:a="http://schemas.openxmlformats.org/drawingml/2006/main" xmlns:r="http://schemas.openxmlformats.org/officeDocument/2006/relationships" xmlns:p="http://schemas.openxmlformats.org/presentationml/2006/main">
+  <p:cSld>
+    <p:spTree>
+      <p:nvGrpSpPr>
+        <p:cNvPr id="1" name="">
+          <a:extLst>
+            <a:ext uri="{FF2B5EF4-FFF2-40B4-BE49-F238E27FC236}">
               <a16:creationId xmlns:a16="http://schemas.microsoft.com/office/drawing/2014/main" id="{A39C25F6-BB1C-0465-ADC9-4B0F43339BBC}"/>
             </a:ext>
           </a:extLst>
@@ -43308,7 +43790,7 @@
 </p:sld>
 </file>
 
-<file path=ppt/slides/slide51.xml><?xml version="1.0" encoding="utf-8"?>
+<file path=ppt/slides/slide52.xml><?xml version="1.0" encoding="utf-8"?>
 <p:sld xmlns:a="http://schemas.openxmlformats.org/drawingml/2006/main" xmlns:r="http://schemas.openxmlformats.org/officeDocument/2006/relationships" xmlns:p="http://schemas.openxmlformats.org/presentationml/2006/main">
   <p:cSld>
     <p:spTree>
@@ -43712,7 +44194,7 @@
 </p:sld>
 </file>
 
-<file path=ppt/slides/slide52.xml><?xml version="1.0" encoding="utf-8"?>
+<file path=ppt/slides/slide53.xml><?xml version="1.0" encoding="utf-8"?>
 <p:sld xmlns:a="http://schemas.openxmlformats.org/drawingml/2006/main" xmlns:r="http://schemas.openxmlformats.org/officeDocument/2006/relationships" xmlns:p="http://schemas.openxmlformats.org/presentationml/2006/main">
   <p:cSld>
     <p:spTree>
@@ -43931,7 +44413,7 @@
 </p:sld>
 </file>
 
-<file path=ppt/slides/slide53.xml><?xml version="1.0" encoding="utf-8"?>
+<file path=ppt/slides/slide54.xml><?xml version="1.0" encoding="utf-8"?>
 <p:sld xmlns:a="http://schemas.openxmlformats.org/drawingml/2006/main" xmlns:r="http://schemas.openxmlformats.org/officeDocument/2006/relationships" xmlns:p="http://schemas.openxmlformats.org/presentationml/2006/main">
   <p:cSld>
     <p:spTree>
@@ -45037,7 +45519,7 @@
 </p:sld>
 </file>
 
-<file path=ppt/slides/slide54.xml><?xml version="1.0" encoding="utf-8"?>
+<file path=ppt/slides/slide55.xml><?xml version="1.0" encoding="utf-8"?>
 <p:sld xmlns:a="http://schemas.openxmlformats.org/drawingml/2006/main" xmlns:r="http://schemas.openxmlformats.org/officeDocument/2006/relationships" xmlns:p="http://schemas.openxmlformats.org/presentationml/2006/main">
   <p:cSld>
     <p:spTree>
